--- a/Q-FerliRoutes-Pitchdeck_final.pptx
+++ b/Q-FerliRoutes-Pitchdeck_final.pptx
@@ -3312,8 +3312,8 @@
         </p:blipFill>
         <p:spPr>
           <a:xfrm>
-            <a:off x="6156336" y="2045713"/>
-            <a:ext cx="5120959" cy="3863853"/>
+            <a:off x="6060658" y="1178560"/>
+            <a:ext cx="6072968" cy="4582160"/>
           </a:xfrm>
           <a:prstGeom prst="rect">
             <a:avLst/>
@@ -3341,8 +3341,8 @@
         </p:blipFill>
         <p:spPr>
           <a:xfrm>
-            <a:off x="928256" y="4069214"/>
-            <a:ext cx="4066308" cy="2788786"/>
+            <a:off x="928256" y="3977404"/>
+            <a:ext cx="4200176" cy="2880596"/>
           </a:xfrm>
           <a:prstGeom prst="rect">
             <a:avLst/>
@@ -3845,6 +3845,60 @@
               </a:solidFill>
               <a:effectLst/>
             </a:endParaRPr>
+          </a:p>
+        </p:txBody>
+      </p:sp>
+      <p:sp>
+        <p:nvSpPr>
+          <p:cNvPr id="6" name="Rectangle 5">
+            <a:extLst>
+              <a:ext uri="{FF2B5EF4-FFF2-40B4-BE49-F238E27FC236}">
+                <a16:creationId xmlns:a16="http://schemas.microsoft.com/office/drawing/2014/main" id="{CE729C5C-EFB7-42F3-D7F4-AA8E9F10FE34}"/>
+              </a:ext>
+            </a:extLst>
+          </p:cNvPr>
+          <p:cNvSpPr/>
+          <p:nvPr/>
+        </p:nvSpPr>
+        <p:spPr>
+          <a:xfrm>
+            <a:off x="6410960" y="1463040"/>
+            <a:ext cx="1442720" cy="721360"/>
+          </a:xfrm>
+          <a:prstGeom prst="rect">
+            <a:avLst/>
+          </a:prstGeom>
+          <a:solidFill>
+            <a:schemeClr val="bg1"/>
+          </a:solidFill>
+          <a:ln>
+            <a:solidFill>
+              <a:schemeClr val="bg1"/>
+            </a:solidFill>
+          </a:ln>
+        </p:spPr>
+        <p:style>
+          <a:lnRef idx="2">
+            <a:schemeClr val="accent1">
+              <a:shade val="15000"/>
+            </a:schemeClr>
+          </a:lnRef>
+          <a:fillRef idx="1">
+            <a:schemeClr val="accent1"/>
+          </a:fillRef>
+          <a:effectRef idx="0">
+            <a:schemeClr val="accent1"/>
+          </a:effectRef>
+          <a:fontRef idx="minor">
+            <a:schemeClr val="lt1"/>
+          </a:fontRef>
+        </p:style>
+        <p:txBody>
+          <a:bodyPr rtlCol="0" anchor="ctr"/>
+          <a:lstStyle/>
+          <a:p>
+            <a:pPr algn="ctr"/>
+            <a:endParaRPr lang="en-US"/>
           </a:p>
         </p:txBody>
       </p:sp>
@@ -6256,6 +6310,67 @@
           </a:prstGeom>
         </p:spPr>
       </p:pic>
+      <p:pic>
+        <p:nvPicPr>
+          <p:cNvPr id="8" name="Picture 7">
+            <a:extLst>
+              <a:ext uri="{FF2B5EF4-FFF2-40B4-BE49-F238E27FC236}">
+                <a16:creationId xmlns:a16="http://schemas.microsoft.com/office/drawing/2014/main" id="{6DE5E282-23E1-891F-562D-1839861017DD}"/>
+              </a:ext>
+            </a:extLst>
+          </p:cNvPr>
+          <p:cNvPicPr>
+            <a:picLocks noChangeAspect="1"/>
+          </p:cNvPicPr>
+          <p:nvPr/>
+        </p:nvPicPr>
+        <p:blipFill>
+          <a:blip r:embed="rId6"/>
+          <a:srcRect t="12592" b="21185"/>
+          <a:stretch>
+            <a:fillRect/>
+          </a:stretch>
+        </p:blipFill>
+        <p:spPr>
+          <a:xfrm>
+            <a:off x="1870749" y="1066800"/>
+            <a:ext cx="3063127" cy="4541520"/>
+          </a:xfrm>
+          <a:prstGeom prst="rect">
+            <a:avLst/>
+          </a:prstGeom>
+        </p:spPr>
+      </p:pic>
+      <p:pic>
+        <p:nvPicPr>
+          <p:cNvPr id="10" name="Picture 9">
+            <a:extLst>
+              <a:ext uri="{FF2B5EF4-FFF2-40B4-BE49-F238E27FC236}">
+                <a16:creationId xmlns:a16="http://schemas.microsoft.com/office/drawing/2014/main" id="{9E3A34AB-804C-9F85-2C7D-DE175FEB61EE}"/>
+              </a:ext>
+            </a:extLst>
+          </p:cNvPr>
+          <p:cNvPicPr>
+            <a:picLocks noChangeAspect="1"/>
+          </p:cNvPicPr>
+          <p:nvPr/>
+        </p:nvPicPr>
+        <p:blipFill>
+          <a:blip r:embed="rId7"/>
+          <a:stretch>
+            <a:fillRect/>
+          </a:stretch>
+        </p:blipFill>
+        <p:spPr>
+          <a:xfrm>
+            <a:off x="5630301" y="1178050"/>
+            <a:ext cx="5614708" cy="4211031"/>
+          </a:xfrm>
+          <a:prstGeom prst="rect">
+            <a:avLst/>
+          </a:prstGeom>
+        </p:spPr>
+      </p:pic>
     </p:spTree>
   </p:cSld>
   <p:clrMapOvr>
@@ -6273,6 +6388,218 @@
       </p:transition>
     </mc:Fallback>
   </mc:AlternateContent>
+  <p:timing>
+    <p:tnLst>
+      <p:par>
+        <p:cTn id="1" dur="indefinite" restart="never" nodeType="tmRoot">
+          <p:childTnLst>
+            <p:seq concurrent="1" nextAc="seek">
+              <p:cTn id="2" dur="indefinite" nodeType="mainSeq">
+                <p:childTnLst>
+                  <p:par>
+                    <p:cTn id="3" fill="hold">
+                      <p:stCondLst>
+                        <p:cond delay="indefinite"/>
+                      </p:stCondLst>
+                      <p:childTnLst>
+                        <p:par>
+                          <p:cTn id="4" fill="hold">
+                            <p:stCondLst>
+                              <p:cond delay="0"/>
+                            </p:stCondLst>
+                            <p:childTnLst>
+                              <p:par>
+                                <p:cTn id="5" presetID="2" presetClass="entr" presetSubtype="4" fill="hold" nodeType="clickEffect">
+                                  <p:stCondLst>
+                                    <p:cond delay="0"/>
+                                  </p:stCondLst>
+                                  <p:childTnLst>
+                                    <p:set>
+                                      <p:cBhvr>
+                                        <p:cTn id="6" dur="1" fill="hold">
+                                          <p:stCondLst>
+                                            <p:cond delay="0"/>
+                                          </p:stCondLst>
+                                        </p:cTn>
+                                        <p:tgtEl>
+                                          <p:spTgt spid="8"/>
+                                        </p:tgtEl>
+                                        <p:attrNameLst>
+                                          <p:attrName>style.visibility</p:attrName>
+                                        </p:attrNameLst>
+                                      </p:cBhvr>
+                                      <p:to>
+                                        <p:strVal val="visible"/>
+                                      </p:to>
+                                    </p:set>
+                                    <p:anim calcmode="lin" valueType="num">
+                                      <p:cBhvr additive="base">
+                                        <p:cTn id="7" dur="500" fill="hold"/>
+                                        <p:tgtEl>
+                                          <p:spTgt spid="8"/>
+                                        </p:tgtEl>
+                                        <p:attrNameLst>
+                                          <p:attrName>ppt_x</p:attrName>
+                                        </p:attrNameLst>
+                                      </p:cBhvr>
+                                      <p:tavLst>
+                                        <p:tav tm="0">
+                                          <p:val>
+                                            <p:strVal val="#ppt_x"/>
+                                          </p:val>
+                                        </p:tav>
+                                        <p:tav tm="100000">
+                                          <p:val>
+                                            <p:strVal val="#ppt_x"/>
+                                          </p:val>
+                                        </p:tav>
+                                      </p:tavLst>
+                                    </p:anim>
+                                    <p:anim calcmode="lin" valueType="num">
+                                      <p:cBhvr additive="base">
+                                        <p:cTn id="8" dur="500" fill="hold"/>
+                                        <p:tgtEl>
+                                          <p:spTgt spid="8"/>
+                                        </p:tgtEl>
+                                        <p:attrNameLst>
+                                          <p:attrName>ppt_y</p:attrName>
+                                        </p:attrNameLst>
+                                      </p:cBhvr>
+                                      <p:tavLst>
+                                        <p:tav tm="0">
+                                          <p:val>
+                                            <p:strVal val="1+#ppt_h/2"/>
+                                          </p:val>
+                                        </p:tav>
+                                        <p:tav tm="100000">
+                                          <p:val>
+                                            <p:strVal val="#ppt_y"/>
+                                          </p:val>
+                                        </p:tav>
+                                      </p:tavLst>
+                                    </p:anim>
+                                  </p:childTnLst>
+                                </p:cTn>
+                              </p:par>
+                            </p:childTnLst>
+                          </p:cTn>
+                        </p:par>
+                      </p:childTnLst>
+                    </p:cTn>
+                  </p:par>
+                  <p:par>
+                    <p:cTn id="9" fill="hold">
+                      <p:stCondLst>
+                        <p:cond delay="indefinite"/>
+                      </p:stCondLst>
+                      <p:childTnLst>
+                        <p:par>
+                          <p:cTn id="10" fill="hold">
+                            <p:stCondLst>
+                              <p:cond delay="0"/>
+                            </p:stCondLst>
+                            <p:childTnLst>
+                              <p:par>
+                                <p:cTn id="11" presetID="2" presetClass="entr" presetSubtype="4" fill="hold" nodeType="clickEffect">
+                                  <p:stCondLst>
+                                    <p:cond delay="0"/>
+                                  </p:stCondLst>
+                                  <p:childTnLst>
+                                    <p:set>
+                                      <p:cBhvr>
+                                        <p:cTn id="12" dur="1" fill="hold">
+                                          <p:stCondLst>
+                                            <p:cond delay="0"/>
+                                          </p:stCondLst>
+                                        </p:cTn>
+                                        <p:tgtEl>
+                                          <p:spTgt spid="10"/>
+                                        </p:tgtEl>
+                                        <p:attrNameLst>
+                                          <p:attrName>style.visibility</p:attrName>
+                                        </p:attrNameLst>
+                                      </p:cBhvr>
+                                      <p:to>
+                                        <p:strVal val="visible"/>
+                                      </p:to>
+                                    </p:set>
+                                    <p:anim calcmode="lin" valueType="num">
+                                      <p:cBhvr additive="base">
+                                        <p:cTn id="13" dur="500" fill="hold"/>
+                                        <p:tgtEl>
+                                          <p:spTgt spid="10"/>
+                                        </p:tgtEl>
+                                        <p:attrNameLst>
+                                          <p:attrName>ppt_x</p:attrName>
+                                        </p:attrNameLst>
+                                      </p:cBhvr>
+                                      <p:tavLst>
+                                        <p:tav tm="0">
+                                          <p:val>
+                                            <p:strVal val="#ppt_x"/>
+                                          </p:val>
+                                        </p:tav>
+                                        <p:tav tm="100000">
+                                          <p:val>
+                                            <p:strVal val="#ppt_x"/>
+                                          </p:val>
+                                        </p:tav>
+                                      </p:tavLst>
+                                    </p:anim>
+                                    <p:anim calcmode="lin" valueType="num">
+                                      <p:cBhvr additive="base">
+                                        <p:cTn id="14" dur="500" fill="hold"/>
+                                        <p:tgtEl>
+                                          <p:spTgt spid="10"/>
+                                        </p:tgtEl>
+                                        <p:attrNameLst>
+                                          <p:attrName>ppt_y</p:attrName>
+                                        </p:attrNameLst>
+                                      </p:cBhvr>
+                                      <p:tavLst>
+                                        <p:tav tm="0">
+                                          <p:val>
+                                            <p:strVal val="1+#ppt_h/2"/>
+                                          </p:val>
+                                        </p:tav>
+                                        <p:tav tm="100000">
+                                          <p:val>
+                                            <p:strVal val="#ppt_y"/>
+                                          </p:val>
+                                        </p:tav>
+                                      </p:tavLst>
+                                    </p:anim>
+                                  </p:childTnLst>
+                                </p:cTn>
+                              </p:par>
+                            </p:childTnLst>
+                          </p:cTn>
+                        </p:par>
+                      </p:childTnLst>
+                    </p:cTn>
+                  </p:par>
+                </p:childTnLst>
+              </p:cTn>
+              <p:prevCondLst>
+                <p:cond evt="onPrev" delay="0">
+                  <p:tgtEl>
+                    <p:sldTgt/>
+                  </p:tgtEl>
+                </p:cond>
+              </p:prevCondLst>
+              <p:nextCondLst>
+                <p:cond evt="onNext" delay="0">
+                  <p:tgtEl>
+                    <p:sldTgt/>
+                  </p:tgtEl>
+                </p:cond>
+              </p:nextCondLst>
+            </p:seq>
+          </p:childTnLst>
+        </p:cTn>
+      </p:par>
+    </p:tnLst>
+  </p:timing>
 </p:sld>
 </file>
 
@@ -6524,7 +6851,7 @@
               <a:buNone/>
             </a:pPr>
             <a:r>
-              <a:rPr lang="en-US" sz="2000" dirty="0">
+              <a:rPr lang="en-US" sz="2400" dirty="0">
                 <a:solidFill>
                   <a:srgbClr val="4B4670"/>
                 </a:solidFill>
@@ -6532,7 +6859,18 @@
                 <a:ea typeface="Calibri" pitchFamily="34" charset="-122"/>
                 <a:cs typeface="Calibri" pitchFamily="34" charset="-120"/>
               </a:rPr>
-              <a:t>The classical model is deployable today. The quantum approach is testable now through cloud simulators and hardware access — D-Wave Leap and Cirq.</a:t>
+              <a:t>The classical model is deployable today. The quantum approach is testable now through cloud simulators and hardware</a:t>
+            </a:r>
+            <a:r>
+              <a:rPr lang="en-US" sz="2000" dirty="0">
+                <a:solidFill>
+                  <a:srgbClr val="4B4670"/>
+                </a:solidFill>
+                <a:latin typeface="Calibri" pitchFamily="34" charset="0"/>
+                <a:ea typeface="Calibri" pitchFamily="34" charset="-122"/>
+                <a:cs typeface="Calibri" pitchFamily="34" charset="-120"/>
+              </a:rPr>
+              <a:t>.</a:t>
             </a:r>
             <a:endParaRPr lang="en-US" sz="2000" dirty="0"/>
           </a:p>
@@ -6813,12 +7151,6 @@
           <a:bodyPr wrap="square" lIns="0" tIns="0" rIns="0" bIns="0" rtlCol="0" anchor="t"/>
           <a:lstStyle/>
           <a:p>
-            <a:pPr marL="0" indent="0">
-              <a:lnSpc>
-                <a:spcPct val="125000"/>
-              </a:lnSpc>
-              <a:buNone/>
-            </a:pPr>
             <a:r>
               <a:rPr lang="en-US" sz="2000" dirty="0">
                 <a:solidFill>
@@ -6828,7 +7160,22 @@
                 <a:ea typeface="Calibri" pitchFamily="34" charset="-122"/>
                 <a:cs typeface="Calibri" pitchFamily="34" charset="-120"/>
               </a:rPr>
-              <a:t>Requires buy-in from NCPB and Baragwi FCS, staff training, and integration with existing dispatch processes.</a:t>
+              <a:t>Requires buy-in from NCPB and </a:t>
+            </a:r>
+            <a:r>
+              <a:rPr lang="en-US" sz="2000" dirty="0"/>
+              <a:t>Farmers Co-operative Society (</a:t>
+            </a:r>
+            <a:r>
+              <a:rPr lang="en-US" sz="2000" dirty="0">
+                <a:solidFill>
+                  <a:srgbClr val="4B4670"/>
+                </a:solidFill>
+                <a:latin typeface="Calibri" pitchFamily="34" charset="0"/>
+                <a:ea typeface="Calibri" pitchFamily="34" charset="-122"/>
+                <a:cs typeface="Calibri" pitchFamily="34" charset="-120"/>
+              </a:rPr>
+              <a:t>FCS), staff training, and integration with existing dispatch processes.</a:t>
             </a:r>
             <a:endParaRPr lang="en-US" sz="2000" dirty="0"/>
           </a:p>
